--- a/TemporalAML_review_2(AnshuKumari).pptx_20261009_032549_0000 (1).pptx
+++ b/TemporalAML_review_2(AnshuKumari).pptx_20261009_032549_0000 (1).pptx
@@ -30666,16 +30666,12 @@
               </a:lnSpc>
             </a:pPr>
             <a:r>
-              <a:rPr lang="en-US" sz="4800" b="1" spc="-21">
+              <a:rPr sz="2200" b="1">
                 <a:solidFill>
-                  <a:srgbClr val="0000FF"/>
+                  <a:srgbClr val="003399"/>
                 </a:solidFill>
-                <a:latin typeface="Times New Roman Bold"/>
-                <a:ea typeface="Times New Roman Bold"/>
-                <a:cs typeface="Times New Roman Bold"/>
-                <a:sym typeface="Times New Roman Bold"/>
               </a:rPr>
-              <a:t>Conclusion</a:t>
+              <a:t>Conclusion &amp; Phase 1 Implementation Results</a:t>
             </a:r>
           </a:p>
         </p:txBody>
@@ -30696,7 +30692,7 @@
           </a:prstGeom>
         </p:spPr>
         <p:txBody>
-          <a:bodyPr lIns="0" tIns="0" rIns="0" bIns="0" rtlCol="0" anchor="t">
+          <a:bodyPr lIns="0" tIns="0" rIns="0" bIns="0" rtlCol="0" anchor="t" wrap="square">
             <a:spAutoFit/>
           </a:bodyPr>
           <a:lstStyle/>
@@ -30705,18 +30701,272 @@
               <a:lnSpc>
                 <a:spcPts val="3840"/>
               </a:lnSpc>
+              <a:spcBef>
+                <a:spcPts val="100"/>
+              </a:spcBef>
+              <a:spcAft>
+                <a:spcPts val="200"/>
+              </a:spcAft>
             </a:pPr>
             <a:r>
-              <a:rPr lang="en-US" sz="3200" spc="-26">
+              <a:rPr b="1" sz="1000">
                 <a:solidFill>
-                  <a:srgbClr val="000000"/>
+                  <a:srgbClr val="003366"/>
                 </a:solidFill>
-                <a:latin typeface="Times New Roman"/>
-                <a:ea typeface="Times New Roman"/>
-                <a:cs typeface="Times New Roman"/>
-                <a:sym typeface="Times New Roman"/>
               </a:rPr>
-              <a:t>This research proposes TemporalAML — a Temporal Graph Attention Network with learnable Fourier time encoding for explainable multi-pattern Anti-Money Laundering detection in cryptocurrency transaction networks. The framework addresses five critical gaps identified across 30+ reviewed papers: static graph representations that ignore time, disconnected temporal modules, fixed frequency encodings, binary-only classification, and absence of pattern-aware explainability. TemporalAML integrates learnable time encoding directly inside graph attention, simultaneously detects circular transfers, layering chains, and smurfing from shared embeddings, and generates per-pattern time-ordered subgraph evidence via GNNExplainer — producing the first AML system capable of compliance-ready Suspicious Activity Report generation. Experimental validation on the Elliptic Bitcoin Dataset against five baselines is expected to demonstrate superior Precision, Recall, F1-Score, and AUC-ROC, with ablation studies confirming the independent contribution of each proposed component.</a:t>
+              <a:t>1. Phase 1 Implementation Status (Objectives O1, O2, O3): </a:t>
+            </a:r>
+            <a:r>
+              <a:rPr b="0" sz="950">
+                <a:solidFill>
+                  <a:srgbClr val="232323"/>
+                </a:solidFill>
+              </a:rPr>
+              <a:t>First three research objectives successfully implemented in Phase 1; Objective 4 (comprehensive explainability &amp; benchmark convergence) scheduled for Phase 2.</a:t>
+            </a:r>
+          </a:p>
+          <a:p>
+            <a:pPr>
+              <a:spcBef>
+                <a:spcPts val="100"/>
+              </a:spcBef>
+              <a:spcAft>
+                <a:spcPts val="200"/>
+              </a:spcAft>
+            </a:pPr>
+          </a:p>
+          <a:p>
+            <a:pPr lvl="1">
+              <a:spcBef>
+                <a:spcPts val="100"/>
+              </a:spcBef>
+              <a:spcAft>
+                <a:spcPts val="100"/>
+              </a:spcAft>
+            </a:pPr>
+            <a:r>
+              <a:rPr sz="900">
+                <a:solidFill>
+                  <a:srgbClr val="464646"/>
+                </a:solidFill>
+              </a:rPr>
+              <a:t>• Objective 1 (Temporal Graph Construction): Completed</a:t>
+            </a:r>
+          </a:p>
+          <a:p>
+            <a:pPr lvl="1">
+              <a:spcBef>
+                <a:spcPts val="100"/>
+              </a:spcBef>
+              <a:spcAft>
+                <a:spcPts val="100"/>
+              </a:spcAft>
+            </a:pPr>
+            <a:r>
+              <a:rPr sz="900">
+                <a:solidFill>
+                  <a:srgbClr val="464646"/>
+                </a:solidFill>
+              </a:rPr>
+              <a:t>• Objective 2 (Learnable Fourier Time Encoding — Core Novelty): Completed</a:t>
+            </a:r>
+          </a:p>
+          <a:p>
+            <a:pPr lvl="1">
+              <a:spcBef>
+                <a:spcPts val="100"/>
+              </a:spcBef>
+              <a:spcAft>
+                <a:spcPts val="100"/>
+              </a:spcAft>
+            </a:pPr>
+            <a:r>
+              <a:rPr sz="900">
+                <a:solidFill>
+                  <a:srgbClr val="464646"/>
+                </a:solidFill>
+              </a:rPr>
+              <a:t>• Objective 3 (Multi-Pattern Detection Architecture): Implemented &amp; Early Results Reported</a:t>
+            </a:r>
+          </a:p>
+          <a:p>
+            <a:pPr lvl="1">
+              <a:spcBef>
+                <a:spcPts val="100"/>
+              </a:spcBef>
+              <a:spcAft>
+                <a:spcPts val="100"/>
+              </a:spcAft>
+            </a:pPr>
+            <a:r>
+              <a:rPr sz="900">
+                <a:solidFill>
+                  <a:srgbClr val="464646"/>
+                </a:solidFill>
+              </a:rPr>
+              <a:t>• Objective 4 (Full Baseline Benchmarking, Ablations &amp; SAR Auditing): Phase 2 Planned Work</a:t>
+            </a:r>
+          </a:p>
+          <a:p>
+            <a:pPr>
+              <a:spcBef>
+                <a:spcPts val="100"/>
+              </a:spcBef>
+              <a:spcAft>
+                <a:spcPts val="200"/>
+              </a:spcAft>
+            </a:pPr>
+            <a:r>
+              <a:rPr b="1" sz="1000">
+                <a:solidFill>
+                  <a:srgbClr val="003366"/>
+                </a:solidFill>
+              </a:rPr>
+              <a:t>2. Confirmed Empirical Results from Dissertation Report: </a:t>
+            </a:r>
+          </a:p>
+          <a:p>
+            <a:pPr>
+              <a:spcBef>
+                <a:spcPts val="100"/>
+              </a:spcBef>
+              <a:spcAft>
+                <a:spcPts val="200"/>
+              </a:spcAft>
+            </a:pPr>
+          </a:p>
+          <a:p>
+            <a:pPr lvl="1">
+              <a:spcBef>
+                <a:spcPts val="100"/>
+              </a:spcBef>
+              <a:spcAft>
+                <a:spcPts val="100"/>
+              </a:spcAft>
+            </a:pPr>
+            <a:r>
+              <a:rPr sz="900">
+                <a:solidFill>
+                  <a:srgbClr val="464646"/>
+                </a:solidFill>
+              </a:rPr>
+              <a:t>• O1 Preprocessing: 203,769 nodes remapped, 234,355 directed edges, 6 topological features added (166 → 172 dims), zero temporal leakage verified on Train (t≤34) / Val (35-42) / Test (43-49) splits.</a:t>
+            </a:r>
+          </a:p>
+          <a:p>
+            <a:pPr lvl="1">
+              <a:spcBef>
+                <a:spcPts val="100"/>
+              </a:spcBef>
+              <a:spcAft>
+                <a:spcPts val="100"/>
+              </a:spcAft>
+            </a:pPr>
+            <a:r>
+              <a:rPr sz="900">
+                <a:solidFill>
+                  <a:srgbClr val="464646"/>
+                </a:solidFill>
+              </a:rPr>
+              <a:t>• O2 Fourier Encoding: Trainable parameters ω, φ ∈ ℝ⁶⁴ integrated into TGATConv; verified non-zero gradient updates (∂L/∂ω ≠ 0); causal neighbor sampling (K=20) eliminates look-ahead leakage.</a:t>
+            </a:r>
+          </a:p>
+          <a:p>
+            <a:pPr lvl="1">
+              <a:spcBef>
+                <a:spcPts val="100"/>
+              </a:spcBef>
+              <a:spcAft>
+                <a:spcPts val="100"/>
+              </a:spcAft>
+            </a:pPr>
+            <a:r>
+              <a:rPr sz="900">
+                <a:solidFill>
+                  <a:srgbClr val="464646"/>
+                </a:solidFill>
+              </a:rPr>
+              <a:t>• O3 Shared Backbone Efficiency: 2-layer TGATConv encoder (172 → 128 → 128 dims, 4 heads) consolidates representations, trimming parameter overhead by ~67% compared to decoupled models.</a:t>
+            </a:r>
+          </a:p>
+          <a:p>
+            <a:pPr lvl="1">
+              <a:spcBef>
+                <a:spcPts val="100"/>
+              </a:spcBef>
+              <a:spcAft>
+                <a:spcPts val="100"/>
+              </a:spcAft>
+            </a:pPr>
+            <a:r>
+              <a:rPr sz="900">
+                <a:solidFill>
+                  <a:srgbClr val="464646"/>
+                </a:solidFill>
+              </a:rPr>
+              <a:t>• O3 Smurfing Head Performance: Achieves early validation AUC-ROC ≈ 0.96, reflecting strong discriminative signal from engineered out-degree and fan-out ratios.</a:t>
+            </a:r>
+          </a:p>
+          <a:p>
+            <a:pPr lvl="1">
+              <a:spcBef>
+                <a:spcPts val="100"/>
+              </a:spcBef>
+              <a:spcAft>
+                <a:spcPts val="100"/>
+              </a:spcAft>
+            </a:pPr>
+            <a:r>
+              <a:rPr sz="900">
+                <a:solidFill>
+                  <a:srgbClr val="464646"/>
+                </a:solidFill>
+              </a:rPr>
+              <a:t>• O3 Layering Head Performance: Achieves early validation AUC-ROC ≈ 0.58; sequential velocity tuning with positive class weights (w_pos ≈ 44.8) currently ongoing.</a:t>
+            </a:r>
+          </a:p>
+          <a:p>
+            <a:pPr lvl="1">
+              <a:spcBef>
+                <a:spcPts val="100"/>
+              </a:spcBef>
+              <a:spcAft>
+                <a:spcPts val="100"/>
+              </a:spcAft>
+            </a:pPr>
+            <a:r>
+              <a:rPr sz="900">
+                <a:solidFill>
+                  <a:srgbClr val="464646"/>
+                </a:solidFill>
+              </a:rPr>
+              <a:t>• O3 Circular Head Observation: Produces near-zero recall, confirming the intrinsic Bitcoin DAG constraint where UTXOs cannot form directed loops without address-level abstraction.</a:t>
+            </a:r>
+          </a:p>
+          <a:p>
+            <a:pPr>
+              <a:spcBef>
+                <a:spcPts val="100"/>
+              </a:spcBef>
+              <a:spcAft>
+                <a:spcPts val="200"/>
+              </a:spcAft>
+            </a:pPr>
+            <a:r>
+              <a:rPr b="1" sz="1000">
+                <a:solidFill>
+                  <a:srgbClr val="003366"/>
+                </a:solidFill>
+              </a:rPr>
+              <a:t>3. Phase 2 Scope &amp; Deliverables: </a:t>
+            </a:r>
+            <a:r>
+              <a:rPr b="0" sz="950">
+                <a:solidFill>
+                  <a:srgbClr val="232323"/>
+                </a:solidFill>
+              </a:rPr>
+              <a:t>Full 200-epoch hyperparameter convergence, comprehensive comparative benchmarking against 4 baselines (GCN, GraphSAGE, GNN-LSTM, Rule-based), AUPRC evaluation curves, and quantitative GNNExplainer fidelity/sparsity auditing for FinCEN SAR compliance.</a:t>
             </a:r>
           </a:p>
         </p:txBody>
